--- a/cloudflare-deploy/public/library/teacher/train-en.pptx
+++ b/cloudflare-deploy/public/library/teacher/train-en.pptx
@@ -6,6 +6,7 @@
   </p:sldMasterIdLst>
   <p:sldIdLst>
     <p:sldId id="256" r:id="rId2"/>
+    <p:sldId id="276" r:id="rId27"/>
     <p:sldId id="257" r:id="rId3"/>
     <p:sldId id="258" r:id="rId4"/>
     <p:sldId id="259" r:id="rId5"/>
@@ -2585,6 +2586,10 @@
           </a:solidFill>
           <a:ln/>
         </p:spPr>
+        <p:txBody>
+          <a:bodyPr/>
+          <a:p/>
+        </p:txBody>
       </p:sp>
       <p:sp>
         <p:nvSpPr>
@@ -2605,6 +2610,10 @@
           </a:solidFill>
           <a:ln/>
         </p:spPr>
+        <p:txBody>
+          <a:bodyPr/>
+          <a:p/>
+        </p:txBody>
       </p:sp>
       <p:pic>
         <p:nvPicPr>
@@ -2736,6 +2745,10 @@
           </a:solidFill>
           <a:ln/>
         </p:spPr>
+        <p:txBody>
+          <a:bodyPr/>
+          <a:p/>
+        </p:txBody>
       </p:sp>
       <p:sp>
         <p:nvSpPr>
@@ -2797,6 +2810,10 @@
           </a:solidFill>
           <a:ln/>
         </p:spPr>
+        <p:txBody>
+          <a:bodyPr/>
+          <a:p/>
+        </p:txBody>
       </p:sp>
       <p:sp>
         <p:nvSpPr>
@@ -2888,6 +2905,10 @@
           </a:solidFill>
           <a:ln/>
         </p:spPr>
+        <p:txBody>
+          <a:bodyPr/>
+          <a:p/>
+        </p:txBody>
       </p:sp>
       <p:sp>
         <p:nvSpPr>
@@ -2903,8 +2924,12 @@
           <a:prstGeom prst="rect">
             <a:avLst/>
           </a:prstGeom>
-          <a:noFill/>
-          <a:ln/>
+          <a:solidFill>
+            <a:srgbClr val="1A73E8"/>
+          </a:solidFill>
+          <a:ln>
+            <a:noFill/>
+          </a:ln>
         </p:spPr>
         <p:txBody>
           <a:bodyPr wrap="square" lIns="0" tIns="0" rIns="0" bIns="0" rtlCol="0" anchor="ctr"/>
@@ -2914,15 +2939,15 @@
               <a:buNone/>
             </a:pPr>
             <a:r>
-              <a:rPr lang="en-US" sz="2400" b="1" dirty="0">
+              <a:rPr lang="en-US" sz="1300" b="1" dirty="0">
                 <a:solidFill>
                   <a:srgbClr val="FFFFFF"/>
                 </a:solidFill>
-                <a:latin typeface="Arial" pitchFamily="34" charset="0"/>
-                <a:ea typeface="Arial" pitchFamily="34" charset="-122"/>
-                <a:cs typeface="Arial" pitchFamily="34" charset="-120"/>
-              </a:rPr>
-              <a:t>5</a:t>
+                <a:latin typeface="Malgun Gothic" pitchFamily="34" charset="0"/>
+                <a:ea typeface="Arial" pitchFamily="34" charset="-122"/>
+                <a:cs typeface="Arial" pitchFamily="34" charset="-120"/>
+              </a:rPr>
+              <a:t>09</a:t>
             </a:r>
             <a:endParaRPr lang="en-US" sz="2400" dirty="0"/>
           </a:p>
@@ -3000,6 +3025,10 @@
             </a:outerShdw>
           </a:effectLst>
         </p:spPr>
+        <p:txBody>
+          <a:bodyPr/>
+          <a:p/>
+        </p:txBody>
       </p:sp>
       <p:sp>
         <p:nvSpPr>
@@ -3022,6 +3051,10 @@
           </a:solidFill>
           <a:ln/>
         </p:spPr>
+        <p:txBody>
+          <a:bodyPr/>
+          <a:p/>
+        </p:txBody>
       </p:sp>
       <p:sp>
         <p:nvSpPr>
@@ -3134,6 +3167,10 @@
             </a:outerShdw>
           </a:effectLst>
         </p:spPr>
+        <p:txBody>
+          <a:bodyPr/>
+          <a:p/>
+        </p:txBody>
       </p:sp>
       <p:sp>
         <p:nvSpPr>
@@ -3156,6 +3193,10 @@
           </a:solidFill>
           <a:ln/>
         </p:spPr>
+        <p:txBody>
+          <a:bodyPr/>
+          <a:p/>
+        </p:txBody>
       </p:sp>
       <p:sp>
         <p:nvSpPr>
@@ -3261,6 +3302,10 @@
             <a:prstDash val="solid"/>
           </a:ln>
         </p:spPr>
+        <p:txBody>
+          <a:bodyPr/>
+          <a:p/>
+        </p:txBody>
       </p:sp>
       <p:sp>
         <p:nvSpPr>
@@ -3283,6 +3328,10 @@
           </a:solidFill>
           <a:ln/>
         </p:spPr>
+        <p:txBody>
+          <a:bodyPr/>
+          <a:p/>
+        </p:txBody>
       </p:sp>
       <p:sp>
         <p:nvSpPr>
@@ -3402,8 +3451,8 @@
         </p:nvSpPr>
         <p:spPr>
           <a:xfrm>
-            <a:off x="548640" y="320040"/>
-            <a:ext cx="11064240" cy="640080"/>
+            <a:off x="1325880" y="320040"/>
+            <a:ext cx="10287000" cy="640080"/>
           </a:xfrm>
           <a:prstGeom prst="rect">
             <a:avLst/>
@@ -5148,6 +5197,49 @@
           </a:graphicData>
         </a:graphic>
       </p:graphicFrame>
+      <p:sp>
+        <p:nvSpPr>
+          <p:cNvPr id="3" name="Text 1"/>
+          <p:cNvSpPr/>
+          <p:nvPr/>
+        </p:nvSpPr>
+        <p:spPr>
+          <a:xfrm>
+            <a:off x="548640" y="301751"/>
+            <a:ext cx="502920" cy="502920"/>
+          </a:xfrm>
+          <a:prstGeom prst="rect">
+            <a:avLst/>
+          </a:prstGeom>
+          <a:solidFill>
+            <a:srgbClr val="1A73E8"/>
+          </a:solidFill>
+          <a:ln>
+            <a:noFill/>
+          </a:ln>
+        </p:spPr>
+        <p:txBody>
+          <a:bodyPr wrap="square" lIns="0" tIns="0" rIns="0" bIns="0" rtlCol="0" anchor="ctr"/>
+          <a:lstStyle/>
+          <a:p>
+            <a:pPr algn="ctr" indent="0" marL="0">
+              <a:buNone/>
+            </a:pPr>
+            <a:r>
+              <a:rPr lang="en-US" sz="1300" b="1" dirty="0">
+                <a:solidFill>
+                  <a:srgbClr val="FFFFFF"/>
+                </a:solidFill>
+                <a:latin typeface="Malgun Gothic" pitchFamily="34" charset="0"/>
+                <a:ea typeface="Arial" pitchFamily="34" charset="-122"/>
+                <a:cs typeface="Arial" pitchFamily="34" charset="-120"/>
+              </a:rPr>
+              <a:t>10</a:t>
+            </a:r>
+            <a:endParaRPr lang="en-US" sz="2400" dirty="0"/>
+          </a:p>
+        </p:txBody>
+      </p:sp>
     </p:spTree>
   </p:cSld>
   <p:clrMapOvr>
@@ -5188,8 +5280,8 @@
         </p:nvSpPr>
         <p:spPr>
           <a:xfrm>
-            <a:off x="548640" y="320040"/>
-            <a:ext cx="11064240" cy="640080"/>
+            <a:off x="1325880" y="320040"/>
+            <a:ext cx="10287000" cy="640080"/>
           </a:xfrm>
           <a:prstGeom prst="rect">
             <a:avLst/>
@@ -5291,6 +5383,10 @@
             </a:outerShdw>
           </a:effectLst>
         </p:spPr>
+        <p:txBody>
+          <a:bodyPr/>
+          <a:p/>
+        </p:txBody>
       </p:sp>
       <p:sp>
         <p:nvSpPr>
@@ -5313,6 +5409,10 @@
           </a:solidFill>
           <a:ln/>
         </p:spPr>
+        <p:txBody>
+          <a:bodyPr/>
+          <a:p/>
+        </p:txBody>
       </p:sp>
       <p:sp>
         <p:nvSpPr>
@@ -5333,6 +5433,10 @@
           </a:solidFill>
           <a:ln/>
         </p:spPr>
+        <p:txBody>
+          <a:bodyPr/>
+          <a:p/>
+        </p:txBody>
       </p:sp>
       <p:sp>
         <p:nvSpPr>
@@ -5484,6 +5588,10 @@
             </a:outerShdw>
           </a:effectLst>
         </p:spPr>
+        <p:txBody>
+          <a:bodyPr/>
+          <a:p/>
+        </p:txBody>
       </p:sp>
       <p:sp>
         <p:nvSpPr>
@@ -5506,6 +5614,10 @@
           </a:solidFill>
           <a:ln/>
         </p:spPr>
+        <p:txBody>
+          <a:bodyPr/>
+          <a:p/>
+        </p:txBody>
       </p:sp>
       <p:sp>
         <p:nvSpPr>
@@ -5526,6 +5638,10 @@
           </a:solidFill>
           <a:ln/>
         </p:spPr>
+        <p:txBody>
+          <a:bodyPr/>
+          <a:p/>
+        </p:txBody>
       </p:sp>
       <p:sp>
         <p:nvSpPr>
@@ -5641,6 +5757,49 @@
               <a:t>Target their instinct to win and their drive to complete a mission. Make heavy use of short-round shooters or 3D battles, and emphasize the joy of collecting badges and items.</a:t>
             </a:r>
             <a:endParaRPr lang="en-US" sz="1300" dirty="0"/>
+          </a:p>
+        </p:txBody>
+      </p:sp>
+      <p:sp>
+        <p:nvSpPr>
+          <p:cNvPr id="3" name="Text 1"/>
+          <p:cNvSpPr/>
+          <p:nvPr/>
+        </p:nvSpPr>
+        <p:spPr>
+          <a:xfrm>
+            <a:off x="548640" y="301751"/>
+            <a:ext cx="502920" cy="502920"/>
+          </a:xfrm>
+          <a:prstGeom prst="rect">
+            <a:avLst/>
+          </a:prstGeom>
+          <a:solidFill>
+            <a:srgbClr val="1A73E8"/>
+          </a:solidFill>
+          <a:ln>
+            <a:noFill/>
+          </a:ln>
+        </p:spPr>
+        <p:txBody>
+          <a:bodyPr wrap="square" lIns="0" tIns="0" rIns="0" bIns="0" rtlCol="0" anchor="ctr"/>
+          <a:lstStyle/>
+          <a:p>
+            <a:pPr algn="ctr" indent="0" marL="0">
+              <a:buNone/>
+            </a:pPr>
+            <a:r>
+              <a:rPr lang="en-US" sz="1300" b="1" dirty="0">
+                <a:solidFill>
+                  <a:srgbClr val="FFFFFF"/>
+                </a:solidFill>
+                <a:latin typeface="Malgun Gothic" pitchFamily="34" charset="0"/>
+                <a:ea typeface="Arial" pitchFamily="34" charset="-122"/>
+                <a:cs typeface="Arial" pitchFamily="34" charset="-120"/>
+              </a:rPr>
+              <a:t>11</a:t>
+            </a:r>
+            <a:endParaRPr lang="en-US" sz="2400" dirty="0"/>
           </a:p>
         </p:txBody>
       </p:sp>
@@ -5684,8 +5843,8 @@
         </p:nvSpPr>
         <p:spPr>
           <a:xfrm>
-            <a:off x="548640" y="320040"/>
-            <a:ext cx="11064240" cy="640080"/>
+            <a:off x="1325880" y="320040"/>
+            <a:ext cx="10287000" cy="640080"/>
           </a:xfrm>
           <a:prstGeom prst="rect">
             <a:avLst/>
@@ -5748,6 +5907,10 @@
             </a:outerShdw>
           </a:effectLst>
         </p:spPr>
+        <p:txBody>
+          <a:bodyPr/>
+          <a:p/>
+        </p:txBody>
       </p:sp>
       <p:sp>
         <p:nvSpPr>
@@ -5770,6 +5933,10 @@
           </a:solidFill>
           <a:ln/>
         </p:spPr>
+        <p:txBody>
+          <a:bodyPr/>
+          <a:p/>
+        </p:txBody>
       </p:sp>
       <p:sp>
         <p:nvSpPr>
@@ -5790,6 +5957,10 @@
           </a:solidFill>
           <a:ln/>
         </p:spPr>
+        <p:txBody>
+          <a:bodyPr/>
+          <a:p/>
+        </p:txBody>
       </p:sp>
       <p:sp>
         <p:nvSpPr>
@@ -5941,6 +6112,10 @@
             </a:outerShdw>
           </a:effectLst>
         </p:spPr>
+        <p:txBody>
+          <a:bodyPr/>
+          <a:p/>
+        </p:txBody>
       </p:sp>
       <p:sp>
         <p:nvSpPr>
@@ -5963,6 +6138,10 @@
           </a:solidFill>
           <a:ln/>
         </p:spPr>
+        <p:txBody>
+          <a:bodyPr/>
+          <a:p/>
+        </p:txBody>
       </p:sp>
       <p:sp>
         <p:nvSpPr>
@@ -5983,6 +6162,10 @@
           </a:solidFill>
           <a:ln/>
         </p:spPr>
+        <p:txBody>
+          <a:bodyPr/>
+          <a:p/>
+        </p:txBody>
       </p:sp>
       <p:sp>
         <p:nvSpPr>
@@ -6098,6 +6281,49 @@
               <a:t>Overly childish tones or exaggerated reactions can backfire. Treat them with adult-to-adult respect and win them over with practical payoffs like test scores or real conversational ability.</a:t>
             </a:r>
             <a:endParaRPr lang="en-US" sz="1300" dirty="0"/>
+          </a:p>
+        </p:txBody>
+      </p:sp>
+      <p:sp>
+        <p:nvSpPr>
+          <p:cNvPr id="3" name="Text 1"/>
+          <p:cNvSpPr/>
+          <p:nvPr/>
+        </p:nvSpPr>
+        <p:spPr>
+          <a:xfrm>
+            <a:off x="548640" y="301751"/>
+            <a:ext cx="502920" cy="502920"/>
+          </a:xfrm>
+          <a:prstGeom prst="rect">
+            <a:avLst/>
+          </a:prstGeom>
+          <a:solidFill>
+            <a:srgbClr val="1A73E8"/>
+          </a:solidFill>
+          <a:ln>
+            <a:noFill/>
+          </a:ln>
+        </p:spPr>
+        <p:txBody>
+          <a:bodyPr wrap="square" lIns="0" tIns="0" rIns="0" bIns="0" rtlCol="0" anchor="ctr"/>
+          <a:lstStyle/>
+          <a:p>
+            <a:pPr algn="ctr" indent="0" marL="0">
+              <a:buNone/>
+            </a:pPr>
+            <a:r>
+              <a:rPr lang="en-US" sz="1300" b="1" dirty="0">
+                <a:solidFill>
+                  <a:srgbClr val="FFFFFF"/>
+                </a:solidFill>
+                <a:latin typeface="Malgun Gothic" pitchFamily="34" charset="0"/>
+                <a:ea typeface="Arial" pitchFamily="34" charset="-122"/>
+                <a:cs typeface="Arial" pitchFamily="34" charset="-120"/>
+              </a:rPr>
+              <a:t>12</a:t>
+            </a:r>
+            <a:endParaRPr lang="en-US" sz="2400" dirty="0"/>
           </a:p>
         </p:txBody>
       </p:sp>
@@ -6141,8 +6367,8 @@
         </p:nvSpPr>
         <p:spPr>
           <a:xfrm>
-            <a:off x="548640" y="320040"/>
-            <a:ext cx="11064240" cy="640080"/>
+            <a:off x="1325880" y="320040"/>
+            <a:ext cx="10287000" cy="640080"/>
           </a:xfrm>
           <a:prstGeom prst="rect">
             <a:avLst/>
@@ -6309,6 +6535,49 @@
               <a:t>Age = minutes of attention span</a:t>
             </a:r>
             <a:endParaRPr lang="en-US" sz="1000" dirty="0"/>
+          </a:p>
+        </p:txBody>
+      </p:sp>
+      <p:sp>
+        <p:nvSpPr>
+          <p:cNvPr id="3" name="Text 1"/>
+          <p:cNvSpPr/>
+          <p:nvPr/>
+        </p:nvSpPr>
+        <p:spPr>
+          <a:xfrm>
+            <a:off x="548640" y="301751"/>
+            <a:ext cx="502920" cy="502920"/>
+          </a:xfrm>
+          <a:prstGeom prst="rect">
+            <a:avLst/>
+          </a:prstGeom>
+          <a:solidFill>
+            <a:srgbClr val="1A73E8"/>
+          </a:solidFill>
+          <a:ln>
+            <a:noFill/>
+          </a:ln>
+        </p:spPr>
+        <p:txBody>
+          <a:bodyPr wrap="square" lIns="0" tIns="0" rIns="0" bIns="0" rtlCol="0" anchor="ctr"/>
+          <a:lstStyle/>
+          <a:p>
+            <a:pPr algn="ctr" indent="0" marL="0">
+              <a:buNone/>
+            </a:pPr>
+            <a:r>
+              <a:rPr lang="en-US" sz="1300" b="1" dirty="0">
+                <a:solidFill>
+                  <a:srgbClr val="FFFFFF"/>
+                </a:solidFill>
+                <a:latin typeface="Malgun Gothic" pitchFamily="34" charset="0"/>
+                <a:ea typeface="Arial" pitchFamily="34" charset="-122"/>
+                <a:cs typeface="Arial" pitchFamily="34" charset="-120"/>
+              </a:rPr>
+              <a:t>13</a:t>
+            </a:r>
+            <a:endParaRPr lang="en-US" sz="2400" dirty="0"/>
           </a:p>
         </p:txBody>
       </p:sp>
@@ -6352,8 +6621,8 @@
         </p:nvSpPr>
         <p:spPr>
           <a:xfrm>
-            <a:off x="548640" y="320040"/>
-            <a:ext cx="11064240" cy="640080"/>
+            <a:off x="1325880" y="320040"/>
+            <a:ext cx="10287000" cy="640080"/>
           </a:xfrm>
           <a:prstGeom prst="rect">
             <a:avLst/>
@@ -6455,6 +6724,10 @@
             </a:outerShdw>
           </a:effectLst>
         </p:spPr>
+        <p:txBody>
+          <a:bodyPr/>
+          <a:p/>
+        </p:txBody>
       </p:sp>
       <p:sp>
         <p:nvSpPr>
@@ -6475,6 +6748,10 @@
           </a:solidFill>
           <a:ln/>
         </p:spPr>
+        <p:txBody>
+          <a:bodyPr/>
+          <a:p/>
+        </p:txBody>
       </p:sp>
       <p:sp>
         <p:nvSpPr>
@@ -6662,6 +6939,10 @@
             </a:outerShdw>
           </a:effectLst>
         </p:spPr>
+        <p:txBody>
+          <a:bodyPr/>
+          <a:p/>
+        </p:txBody>
       </p:sp>
       <p:sp>
         <p:nvSpPr>
@@ -6682,6 +6963,10 @@
           </a:solidFill>
           <a:ln/>
         </p:spPr>
+        <p:txBody>
+          <a:bodyPr/>
+          <a:p/>
+        </p:txBody>
       </p:sp>
       <p:sp>
         <p:nvSpPr>
@@ -6869,6 +7154,10 @@
             </a:outerShdw>
           </a:effectLst>
         </p:spPr>
+        <p:txBody>
+          <a:bodyPr/>
+          <a:p/>
+        </p:txBody>
       </p:sp>
       <p:sp>
         <p:nvSpPr>
@@ -6889,6 +7178,10 @@
           </a:solidFill>
           <a:ln/>
         </p:spPr>
+        <p:txBody>
+          <a:bodyPr/>
+          <a:p/>
+        </p:txBody>
       </p:sp>
       <p:sp>
         <p:nvSpPr>
@@ -7004,6 +7297,49 @@
               <a:t>Minimize explanation; repeat 'ask -&gt; answer -&gt; ask again' so the child produces their own speech. The teacher is a conversation partner, not a lecturer.</a:t>
             </a:r>
             <a:endParaRPr lang="en-US" sz="1200" dirty="0"/>
+          </a:p>
+        </p:txBody>
+      </p:sp>
+      <p:sp>
+        <p:nvSpPr>
+          <p:cNvPr id="3" name="Text 1"/>
+          <p:cNvSpPr/>
+          <p:nvPr/>
+        </p:nvSpPr>
+        <p:spPr>
+          <a:xfrm>
+            <a:off x="548640" y="301751"/>
+            <a:ext cx="502920" cy="502920"/>
+          </a:xfrm>
+          <a:prstGeom prst="rect">
+            <a:avLst/>
+          </a:prstGeom>
+          <a:solidFill>
+            <a:srgbClr val="1A73E8"/>
+          </a:solidFill>
+          <a:ln>
+            <a:noFill/>
+          </a:ln>
+        </p:spPr>
+        <p:txBody>
+          <a:bodyPr wrap="square" lIns="0" tIns="0" rIns="0" bIns="0" rtlCol="0" anchor="ctr"/>
+          <a:lstStyle/>
+          <a:p>
+            <a:pPr algn="ctr" indent="0" marL="0">
+              <a:buNone/>
+            </a:pPr>
+            <a:r>
+              <a:rPr lang="en-US" sz="1300" b="1" dirty="0">
+                <a:solidFill>
+                  <a:srgbClr val="FFFFFF"/>
+                </a:solidFill>
+                <a:latin typeface="Malgun Gothic" pitchFamily="34" charset="0"/>
+                <a:ea typeface="Arial" pitchFamily="34" charset="-122"/>
+                <a:cs typeface="Arial" pitchFamily="34" charset="-120"/>
+              </a:rPr>
+              <a:t>14</a:t>
+            </a:r>
+            <a:endParaRPr lang="en-US" sz="2400" dirty="0"/>
           </a:p>
         </p:txBody>
       </p:sp>
@@ -7047,8 +7383,8 @@
         </p:nvSpPr>
         <p:spPr>
           <a:xfrm>
-            <a:off x="548640" y="320040"/>
-            <a:ext cx="11064240" cy="640080"/>
+            <a:off x="1325880" y="320040"/>
+            <a:ext cx="10287000" cy="640080"/>
           </a:xfrm>
           <a:prstGeom prst="rect">
             <a:avLst/>
@@ -7111,6 +7447,10 @@
             </a:outerShdw>
           </a:effectLst>
         </p:spPr>
+        <p:txBody>
+          <a:bodyPr/>
+          <a:p/>
+        </p:txBody>
       </p:sp>
       <p:sp>
         <p:nvSpPr>
@@ -7131,6 +7471,10 @@
           </a:solidFill>
           <a:ln/>
         </p:spPr>
+        <p:txBody>
+          <a:bodyPr/>
+          <a:p/>
+        </p:txBody>
       </p:sp>
       <p:sp>
         <p:nvSpPr>
@@ -7318,6 +7662,10 @@
             </a:outerShdw>
           </a:effectLst>
         </p:spPr>
+        <p:txBody>
+          <a:bodyPr/>
+          <a:p/>
+        </p:txBody>
       </p:sp>
       <p:sp>
         <p:nvSpPr>
@@ -7338,6 +7686,10 @@
           </a:solidFill>
           <a:ln/>
         </p:spPr>
+        <p:txBody>
+          <a:bodyPr/>
+          <a:p/>
+        </p:txBody>
       </p:sp>
       <p:sp>
         <p:nvSpPr>
@@ -7525,6 +7877,10 @@
             </a:outerShdw>
           </a:effectLst>
         </p:spPr>
+        <p:txBody>
+          <a:bodyPr/>
+          <a:p/>
+        </p:txBody>
       </p:sp>
       <p:sp>
         <p:nvSpPr>
@@ -7545,6 +7901,10 @@
           </a:solidFill>
           <a:ln/>
         </p:spPr>
+        <p:txBody>
+          <a:bodyPr/>
+          <a:p/>
+        </p:txBody>
       </p:sp>
       <p:sp>
         <p:nvSpPr>
@@ -7660,6 +8020,49 @@
               <a:t>Immediately note today's tricky pronunciation or pattern — it becomes the fuel for next class's warm-up.</a:t>
             </a:r>
             <a:endParaRPr lang="en-US" sz="1200" dirty="0"/>
+          </a:p>
+        </p:txBody>
+      </p:sp>
+      <p:sp>
+        <p:nvSpPr>
+          <p:cNvPr id="3" name="Text 1"/>
+          <p:cNvSpPr/>
+          <p:nvPr/>
+        </p:nvSpPr>
+        <p:spPr>
+          <a:xfrm>
+            <a:off x="548640" y="301751"/>
+            <a:ext cx="502920" cy="502920"/>
+          </a:xfrm>
+          <a:prstGeom prst="rect">
+            <a:avLst/>
+          </a:prstGeom>
+          <a:solidFill>
+            <a:srgbClr val="1A73E8"/>
+          </a:solidFill>
+          <a:ln>
+            <a:noFill/>
+          </a:ln>
+        </p:spPr>
+        <p:txBody>
+          <a:bodyPr wrap="square" lIns="0" tIns="0" rIns="0" bIns="0" rtlCol="0" anchor="ctr"/>
+          <a:lstStyle/>
+          <a:p>
+            <a:pPr algn="ctr" indent="0" marL="0">
+              <a:buNone/>
+            </a:pPr>
+            <a:r>
+              <a:rPr lang="en-US" sz="1300" b="1" dirty="0">
+                <a:solidFill>
+                  <a:srgbClr val="FFFFFF"/>
+                </a:solidFill>
+                <a:latin typeface="Malgun Gothic" pitchFamily="34" charset="0"/>
+                <a:ea typeface="Arial" pitchFamily="34" charset="-122"/>
+                <a:cs typeface="Arial" pitchFamily="34" charset="-120"/>
+              </a:rPr>
+              <a:t>15</a:t>
+            </a:r>
+            <a:endParaRPr lang="en-US" sz="2400" dirty="0"/>
           </a:p>
         </p:txBody>
       </p:sp>
@@ -7703,8 +8106,8 @@
         </p:nvSpPr>
         <p:spPr>
           <a:xfrm>
-            <a:off x="548640" y="320040"/>
-            <a:ext cx="11064240" cy="640080"/>
+            <a:off x="1325880" y="320040"/>
+            <a:ext cx="10287000" cy="640080"/>
           </a:xfrm>
           <a:prstGeom prst="rect">
             <a:avLst/>
@@ -7806,6 +8209,10 @@
             </a:outerShdw>
           </a:effectLst>
         </p:spPr>
+        <p:txBody>
+          <a:bodyPr/>
+          <a:p/>
+        </p:txBody>
       </p:sp>
       <p:sp>
         <p:nvSpPr>
@@ -7828,6 +8235,10 @@
           </a:solidFill>
           <a:ln/>
         </p:spPr>
+        <p:txBody>
+          <a:bodyPr/>
+          <a:p/>
+        </p:txBody>
       </p:sp>
       <p:sp>
         <p:nvSpPr>
@@ -7848,6 +8259,10 @@
           </a:solidFill>
           <a:ln/>
         </p:spPr>
+        <p:txBody>
+          <a:bodyPr/>
+          <a:p/>
+        </p:txBody>
       </p:sp>
       <p:sp>
         <p:nvSpPr>
@@ -8066,6 +8481,10 @@
             </a:outerShdw>
           </a:effectLst>
         </p:spPr>
+        <p:txBody>
+          <a:bodyPr/>
+          <a:p/>
+        </p:txBody>
       </p:sp>
       <p:sp>
         <p:nvSpPr>
@@ -8088,6 +8507,10 @@
           </a:solidFill>
           <a:ln/>
         </p:spPr>
+        <p:txBody>
+          <a:bodyPr/>
+          <a:p/>
+        </p:txBody>
       </p:sp>
       <p:sp>
         <p:nvSpPr>
@@ -8108,6 +8531,10 @@
           </a:solidFill>
           <a:ln/>
         </p:spPr>
+        <p:txBody>
+          <a:bodyPr/>
+          <a:p/>
+        </p:txBody>
       </p:sp>
       <p:sp>
         <p:nvSpPr>
@@ -8367,6 +8794,10 @@
             </a:outerShdw>
           </a:effectLst>
         </p:spPr>
+        <p:txBody>
+          <a:bodyPr/>
+          <a:p/>
+        </p:txBody>
       </p:sp>
       <p:sp>
         <p:nvSpPr>
@@ -8389,6 +8820,10 @@
           </a:solidFill>
           <a:ln/>
         </p:spPr>
+        <p:txBody>
+          <a:bodyPr/>
+          <a:p/>
+        </p:txBody>
       </p:sp>
       <p:sp>
         <p:nvSpPr>
@@ -8409,6 +8844,10 @@
           </a:solidFill>
           <a:ln/>
         </p:spPr>
+        <p:txBody>
+          <a:bodyPr/>
+          <a:p/>
+        </p:txBody>
       </p:sp>
       <p:sp>
         <p:nvSpPr>
@@ -8550,6 +8989,49 @@
               <a:t>Leave a hint made just for this child</a:t>
             </a:r>
             <a:endParaRPr lang="en-US" sz="1050" dirty="0"/>
+          </a:p>
+        </p:txBody>
+      </p:sp>
+      <p:sp>
+        <p:nvSpPr>
+          <p:cNvPr id="3" name="Text 1"/>
+          <p:cNvSpPr/>
+          <p:nvPr/>
+        </p:nvSpPr>
+        <p:spPr>
+          <a:xfrm>
+            <a:off x="548640" y="301751"/>
+            <a:ext cx="502920" cy="502920"/>
+          </a:xfrm>
+          <a:prstGeom prst="rect">
+            <a:avLst/>
+          </a:prstGeom>
+          <a:solidFill>
+            <a:srgbClr val="1A73E8"/>
+          </a:solidFill>
+          <a:ln>
+            <a:noFill/>
+          </a:ln>
+        </p:spPr>
+        <p:txBody>
+          <a:bodyPr wrap="square" lIns="0" tIns="0" rIns="0" bIns="0" rtlCol="0" anchor="ctr"/>
+          <a:lstStyle/>
+          <a:p>
+            <a:pPr algn="ctr" indent="0" marL="0">
+              <a:buNone/>
+            </a:pPr>
+            <a:r>
+              <a:rPr lang="en-US" sz="1300" b="1" dirty="0">
+                <a:solidFill>
+                  <a:srgbClr val="FFFFFF"/>
+                </a:solidFill>
+                <a:latin typeface="Malgun Gothic" pitchFamily="34" charset="0"/>
+                <a:ea typeface="Arial" pitchFamily="34" charset="-122"/>
+                <a:cs typeface="Arial" pitchFamily="34" charset="-120"/>
+              </a:rPr>
+              <a:t>16</a:t>
+            </a:r>
+            <a:endParaRPr lang="en-US" sz="2400" dirty="0"/>
           </a:p>
         </p:txBody>
       </p:sp>
@@ -8593,8 +9075,8 @@
         </p:nvSpPr>
         <p:spPr>
           <a:xfrm>
-            <a:off x="548640" y="320040"/>
-            <a:ext cx="11064240" cy="640080"/>
+            <a:off x="1325880" y="320040"/>
+            <a:ext cx="10287000" cy="640080"/>
           </a:xfrm>
           <a:prstGeom prst="rect">
             <a:avLst/>
@@ -10136,6 +10618,49 @@
           </a:graphicData>
         </a:graphic>
       </p:graphicFrame>
+      <p:sp>
+        <p:nvSpPr>
+          <p:cNvPr id="3" name="Text 1"/>
+          <p:cNvSpPr/>
+          <p:nvPr/>
+        </p:nvSpPr>
+        <p:spPr>
+          <a:xfrm>
+            <a:off x="548640" y="301751"/>
+            <a:ext cx="502920" cy="502920"/>
+          </a:xfrm>
+          <a:prstGeom prst="rect">
+            <a:avLst/>
+          </a:prstGeom>
+          <a:solidFill>
+            <a:srgbClr val="1A73E8"/>
+          </a:solidFill>
+          <a:ln>
+            <a:noFill/>
+          </a:ln>
+        </p:spPr>
+        <p:txBody>
+          <a:bodyPr wrap="square" lIns="0" tIns="0" rIns="0" bIns="0" rtlCol="0" anchor="ctr"/>
+          <a:lstStyle/>
+          <a:p>
+            <a:pPr algn="ctr" indent="0" marL="0">
+              <a:buNone/>
+            </a:pPr>
+            <a:r>
+              <a:rPr lang="en-US" sz="1300" b="1" dirty="0">
+                <a:solidFill>
+                  <a:srgbClr val="FFFFFF"/>
+                </a:solidFill>
+                <a:latin typeface="Malgun Gothic" pitchFamily="34" charset="0"/>
+                <a:ea typeface="Arial" pitchFamily="34" charset="-122"/>
+                <a:cs typeface="Arial" pitchFamily="34" charset="-120"/>
+              </a:rPr>
+              <a:t>17</a:t>
+            </a:r>
+            <a:endParaRPr lang="en-US" sz="2400" dirty="0"/>
+          </a:p>
+        </p:txBody>
+      </p:sp>
     </p:spTree>
   </p:cSld>
   <p:clrMapOvr>
@@ -10176,8 +10701,8 @@
         </p:nvSpPr>
         <p:spPr>
           <a:xfrm>
-            <a:off x="548640" y="320040"/>
-            <a:ext cx="11064240" cy="640080"/>
+            <a:off x="1325880" y="320040"/>
+            <a:ext cx="10287000" cy="640080"/>
           </a:xfrm>
           <a:prstGeom prst="rect">
             <a:avLst/>
@@ -10233,6 +10758,10 @@
             <a:prstDash val="solid"/>
           </a:ln>
         </p:spPr>
+        <p:txBody>
+          <a:bodyPr/>
+          <a:p/>
+        </p:txBody>
       </p:sp>
       <p:sp>
         <p:nvSpPr>
@@ -10255,6 +10784,10 @@
           </a:solidFill>
           <a:ln/>
         </p:spPr>
+        <p:txBody>
+          <a:bodyPr/>
+          <a:p/>
+        </p:txBody>
       </p:sp>
       <p:sp>
         <p:nvSpPr>
@@ -10360,6 +10893,10 @@
             <a:prstDash val="solid"/>
           </a:ln>
         </p:spPr>
+        <p:txBody>
+          <a:bodyPr/>
+          <a:p/>
+        </p:txBody>
       </p:sp>
       <p:sp>
         <p:nvSpPr>
@@ -10382,6 +10919,10 @@
           </a:solidFill>
           <a:ln/>
         </p:spPr>
+        <p:txBody>
+          <a:bodyPr/>
+          <a:p/>
+        </p:txBody>
       </p:sp>
       <p:sp>
         <p:nvSpPr>
@@ -10487,6 +11028,10 @@
             <a:prstDash val="solid"/>
           </a:ln>
         </p:spPr>
+        <p:txBody>
+          <a:bodyPr/>
+          <a:p/>
+        </p:txBody>
       </p:sp>
       <p:sp>
         <p:nvSpPr>
@@ -10509,6 +11054,10 @@
           </a:solidFill>
           <a:ln/>
         </p:spPr>
+        <p:txBody>
+          <a:bodyPr/>
+          <a:p/>
+        </p:txBody>
       </p:sp>
       <p:sp>
         <p:nvSpPr>
@@ -10585,6 +11134,49 @@
               <a:t>Improvement is urgently needed across multiple areas. A 1-on-1 mock-class feedback session is strongly recommended.</a:t>
             </a:r>
             <a:endParaRPr lang="en-US" sz="1250" dirty="0"/>
+          </a:p>
+        </p:txBody>
+      </p:sp>
+      <p:sp>
+        <p:nvSpPr>
+          <p:cNvPr id="3" name="Text 1"/>
+          <p:cNvSpPr/>
+          <p:nvPr/>
+        </p:nvSpPr>
+        <p:spPr>
+          <a:xfrm>
+            <a:off x="548640" y="301751"/>
+            <a:ext cx="502920" cy="502920"/>
+          </a:xfrm>
+          <a:prstGeom prst="rect">
+            <a:avLst/>
+          </a:prstGeom>
+          <a:solidFill>
+            <a:srgbClr val="1A73E8"/>
+          </a:solidFill>
+          <a:ln>
+            <a:noFill/>
+          </a:ln>
+        </p:spPr>
+        <p:txBody>
+          <a:bodyPr wrap="square" lIns="0" tIns="0" rIns="0" bIns="0" rtlCol="0" anchor="ctr"/>
+          <a:lstStyle/>
+          <a:p>
+            <a:pPr algn="ctr" indent="0" marL="0">
+              <a:buNone/>
+            </a:pPr>
+            <a:r>
+              <a:rPr lang="en-US" sz="1300" b="1" dirty="0">
+                <a:solidFill>
+                  <a:srgbClr val="FFFFFF"/>
+                </a:solidFill>
+                <a:latin typeface="Malgun Gothic" pitchFamily="34" charset="0"/>
+                <a:ea typeface="Arial" pitchFamily="34" charset="-122"/>
+                <a:cs typeface="Arial" pitchFamily="34" charset="-120"/>
+              </a:rPr>
+              <a:t>18</a:t>
+            </a:r>
+            <a:endParaRPr lang="en-US" sz="2400" dirty="0"/>
           </a:p>
         </p:txBody>
       </p:sp>
@@ -10628,8 +11220,8 @@
         </p:nvSpPr>
         <p:spPr>
           <a:xfrm>
-            <a:off x="640080" y="548640"/>
-            <a:ext cx="10972800" cy="868680"/>
+            <a:off x="1417319" y="548640"/>
+            <a:ext cx="10195560" cy="868680"/>
           </a:xfrm>
           <a:prstGeom prst="rect">
             <a:avLst/>
@@ -10797,6 +11389,10 @@
           </a:solidFill>
           <a:ln/>
         </p:spPr>
+        <p:txBody>
+          <a:bodyPr/>
+          <a:p/>
+        </p:txBody>
       </p:sp>
       <p:sp>
         <p:nvSpPr>
@@ -10861,6 +11457,49 @@
           </a:prstGeom>
         </p:spPr>
       </p:pic>
+      <p:sp>
+        <p:nvSpPr>
+          <p:cNvPr id="3" name="Text 1"/>
+          <p:cNvSpPr/>
+          <p:nvPr/>
+        </p:nvSpPr>
+        <p:spPr>
+          <a:xfrm>
+            <a:off x="640080" y="530352"/>
+            <a:ext cx="502920" cy="502920"/>
+          </a:xfrm>
+          <a:prstGeom prst="rect">
+            <a:avLst/>
+          </a:prstGeom>
+          <a:solidFill>
+            <a:srgbClr val="1A73E8"/>
+          </a:solidFill>
+          <a:ln>
+            <a:noFill/>
+          </a:ln>
+        </p:spPr>
+        <p:txBody>
+          <a:bodyPr wrap="square" lIns="0" tIns="0" rIns="0" bIns="0" rtlCol="0" anchor="ctr"/>
+          <a:lstStyle/>
+          <a:p>
+            <a:pPr algn="ctr" indent="0" marL="0">
+              <a:buNone/>
+            </a:pPr>
+            <a:r>
+              <a:rPr lang="en-US" sz="1300" b="1" dirty="0">
+                <a:solidFill>
+                  <a:srgbClr val="FFFFFF"/>
+                </a:solidFill>
+                <a:latin typeface="Malgun Gothic" pitchFamily="34" charset="0"/>
+                <a:ea typeface="Arial" pitchFamily="34" charset="-122"/>
+                <a:cs typeface="Arial" pitchFamily="34" charset="-120"/>
+              </a:rPr>
+              <a:t>01</a:t>
+            </a:r>
+            <a:endParaRPr lang="en-US" sz="2400" dirty="0"/>
+          </a:p>
+        </p:txBody>
+      </p:sp>
     </p:spTree>
   </p:cSld>
   <p:clrMapOvr>
@@ -10912,6 +11551,10 @@
           </a:solidFill>
           <a:ln/>
         </p:spPr>
+        <p:txBody>
+          <a:bodyPr/>
+          <a:p/>
+        </p:txBody>
       </p:sp>
       <p:sp>
         <p:nvSpPr>
@@ -10932,6 +11575,10 @@
           </a:solidFill>
           <a:ln/>
         </p:spPr>
+        <p:txBody>
+          <a:bodyPr/>
+          <a:p/>
+        </p:txBody>
       </p:sp>
       <p:pic>
         <p:nvPicPr>
@@ -10965,8 +11612,8 @@
         </p:nvSpPr>
         <p:spPr>
           <a:xfrm>
-            <a:off x="731520" y="457200"/>
-            <a:ext cx="10698480" cy="640080"/>
+            <a:off x="1508760" y="457200"/>
+            <a:ext cx="9921240" cy="640080"/>
           </a:xfrm>
           <a:prstGeom prst="rect">
             <a:avLst/>
@@ -11056,6 +11703,10 @@
           </a:solidFill>
           <a:ln/>
         </p:spPr>
+        <p:txBody>
+          <a:bodyPr/>
+          <a:p/>
+        </p:txBody>
       </p:sp>
       <p:sp>
         <p:nvSpPr>
@@ -11157,6 +11808,10 @@
             <a:prstDash val="solid"/>
           </a:ln>
         </p:spPr>
+        <p:txBody>
+          <a:bodyPr/>
+          <a:p/>
+        </p:txBody>
       </p:sp>
       <p:sp>
         <p:nvSpPr>
@@ -11258,6 +11913,10 @@
             <a:prstDash val="solid"/>
           </a:ln>
         </p:spPr>
+        <p:txBody>
+          <a:bodyPr/>
+          <a:p/>
+        </p:txBody>
       </p:sp>
       <p:sp>
         <p:nvSpPr>
@@ -11373,6 +12032,770 @@
               <a:t>© Mangoi English | Teacher Success Team</a:t>
             </a:r>
             <a:endParaRPr lang="en-US" sz="1000" dirty="0"/>
+          </a:p>
+        </p:txBody>
+      </p:sp>
+      <p:sp>
+        <p:nvSpPr>
+          <p:cNvPr id="3" name="Text 1"/>
+          <p:cNvSpPr/>
+          <p:nvPr/>
+        </p:nvSpPr>
+        <p:spPr>
+          <a:xfrm>
+            <a:off x="731520" y="438912"/>
+            <a:ext cx="502920" cy="502920"/>
+          </a:xfrm>
+          <a:prstGeom prst="rect">
+            <a:avLst/>
+          </a:prstGeom>
+          <a:solidFill>
+            <a:srgbClr val="1A73E8"/>
+          </a:solidFill>
+          <a:ln>
+            <a:noFill/>
+          </a:ln>
+        </p:spPr>
+        <p:txBody>
+          <a:bodyPr wrap="square" lIns="0" tIns="0" rIns="0" bIns="0" rtlCol="0" anchor="ctr"/>
+          <a:lstStyle/>
+          <a:p>
+            <a:pPr algn="ctr" indent="0" marL="0">
+              <a:buNone/>
+            </a:pPr>
+            <a:r>
+              <a:rPr lang="en-US" sz="1300" b="1" dirty="0">
+                <a:solidFill>
+                  <a:srgbClr val="FFFFFF"/>
+                </a:solidFill>
+                <a:latin typeface="Malgun Gothic" pitchFamily="34" charset="0"/>
+                <a:ea typeface="Arial" pitchFamily="34" charset="-122"/>
+                <a:cs typeface="Arial" pitchFamily="34" charset="-120"/>
+              </a:rPr>
+              <a:t>19</a:t>
+            </a:r>
+            <a:endParaRPr lang="en-US" sz="2400" dirty="0"/>
+          </a:p>
+        </p:txBody>
+      </p:sp>
+    </p:spTree>
+  </p:cSld>
+  <p:clrMapOvr>
+    <a:masterClrMapping/>
+  </p:clrMapOvr>
+</p:sld>
+</file>
+
+<file path=ppt/slides/slide21.xml><?xml version="1.0" encoding="utf-8"?>
+<p:sld xmlns:a="http://schemas.openxmlformats.org/drawingml/2006/main" xmlns:p="http://schemas.openxmlformats.org/presentationml/2006/main" xmlns:r="http://schemas.openxmlformats.org/officeDocument/2006/relationships">
+  <p:cSld>
+    <p:spTree>
+      <p:nvGrpSpPr>
+        <p:cNvPr id="1" name=""/>
+        <p:cNvGrpSpPr/>
+        <p:nvPr/>
+      </p:nvGrpSpPr>
+      <p:grpSpPr/>
+      <p:sp>
+        <p:nvSpPr>
+          <p:cNvPr id="2" name="TextBox 1"/>
+          <p:cNvSpPr txBox="1"/>
+          <p:nvPr/>
+        </p:nvSpPr>
+        <p:spPr>
+          <a:xfrm>
+            <a:off x="548640" y="320040"/>
+            <a:ext cx="9144000" cy="640080"/>
+          </a:xfrm>
+          <a:prstGeom prst="rect">
+            <a:avLst/>
+          </a:prstGeom>
+          <a:noFill/>
+        </p:spPr>
+        <p:txBody>
+          <a:bodyPr wrap="none">
+            <a:spAutoFit/>
+          </a:bodyPr>
+          <a:lstStyle/>
+          <a:p>
+            <a:r>
+              <a:rPr sz="3000" b="1">
+                <a:solidFill>
+                  <a:srgbClr val="1A73E8"/>
+                </a:solidFill>
+                <a:latin typeface="Malgun Gothic"/>
+              </a:rPr>
+              <a:t>Table of Contents</a:t>
+            </a:r>
+          </a:p>
+        </p:txBody>
+      </p:sp>
+      <p:sp>
+        <p:nvSpPr>
+          <p:cNvPr id="3" name="TextBox 2"/>
+          <p:cNvSpPr txBox="1"/>
+          <p:nvPr/>
+        </p:nvSpPr>
+        <p:spPr>
+          <a:xfrm>
+            <a:off x="548640" y="1417320"/>
+            <a:ext cx="10817352" cy="5166360"/>
+          </a:xfrm>
+          <a:prstGeom prst="rect">
+            <a:avLst/>
+          </a:prstGeom>
+          <a:noFill/>
+        </p:spPr>
+        <p:txBody>
+          <a:bodyPr wrap="none">
+            <a:spAutoFit/>
+          </a:bodyPr>
+          <a:lstStyle/>
+          <a:p>
+            <a:pPr>
+              <a:spcAft>
+                <a:spcPts val="521"/>
+              </a:spcAft>
+            </a:pPr>
+            <a:r>
+              <a:rPr sz="1200" b="1">
+                <a:solidFill>
+                  <a:srgbClr val="1A73E8"/>
+                </a:solidFill>
+                <a:latin typeface="Malgun Gothic"/>
+              </a:rPr>
+              <a:t>01  </a:t>
+            </a:r>
+            <a:r>
+              <a:rPr sz="1200">
+                <a:solidFill>
+                  <a:srgbClr val="202A3C"/>
+                </a:solidFill>
+                <a:latin typeface="Malgun Gothic"/>
+              </a:rPr>
+              <a:t>You're Not Just Changing a Test Score</a:t>
+            </a:r>
+            <a:r>
+              <a:rPr sz="1000">
+                <a:solidFill>
+                  <a:srgbClr val="94A3B8"/>
+                </a:solidFill>
+                <a:latin typeface="Malgun Gothic"/>
+              </a:rPr>
+              <a:t>   ·  p.3</a:t>
+            </a:r>
+          </a:p>
+          <a:p>
+            <a:pPr>
+              <a:spcAft>
+                <a:spcPts val="521"/>
+              </a:spcAft>
+            </a:pPr>
+            <a:r>
+              <a:rPr sz="1200" b="1">
+                <a:solidFill>
+                  <a:srgbClr val="1A73E8"/>
+                </a:solidFill>
+                <a:latin typeface="Malgun Gothic"/>
+              </a:rPr>
+              <a:t>02  </a:t>
+            </a:r>
+            <a:r>
+              <a:rPr sz="1200">
+                <a:solidFill>
+                  <a:srgbClr val="202A3C"/>
+                </a:solidFill>
+                <a:latin typeface="Malgun Gothic"/>
+              </a:rPr>
+              <a:t>Remember these 4 numbers before every class</a:t>
+            </a:r>
+            <a:r>
+              <a:rPr sz="1000">
+                <a:solidFill>
+                  <a:srgbClr val="94A3B8"/>
+                </a:solidFill>
+                <a:latin typeface="Malgun Gothic"/>
+              </a:rPr>
+              <a:t>   ·  p.4</a:t>
+            </a:r>
+          </a:p>
+          <a:p>
+            <a:pPr>
+              <a:spcAft>
+                <a:spcPts val="521"/>
+              </a:spcAft>
+            </a:pPr>
+            <a:r>
+              <a:rPr sz="1200" b="1">
+                <a:solidFill>
+                  <a:srgbClr val="1A73E8"/>
+                </a:solidFill>
+                <a:latin typeface="Malgun Gothic"/>
+              </a:rPr>
+              <a:t>03  </a:t>
+            </a:r>
+            <a:r>
+              <a:rPr sz="1200">
+                <a:solidFill>
+                  <a:srgbClr val="202A3C"/>
+                </a:solidFill>
+                <a:latin typeface="Malgun Gothic"/>
+              </a:rPr>
+              <a:t>01. Why This Manual Exists</a:t>
+            </a:r>
+            <a:r>
+              <a:rPr sz="1000">
+                <a:solidFill>
+                  <a:srgbClr val="94A3B8"/>
+                </a:solidFill>
+                <a:latin typeface="Malgun Gothic"/>
+              </a:rPr>
+              <a:t>   ·  p.5</a:t>
+            </a:r>
+          </a:p>
+          <a:p>
+            <a:pPr>
+              <a:spcAft>
+                <a:spcPts val="521"/>
+              </a:spcAft>
+            </a:pPr>
+            <a:r>
+              <a:rPr sz="1200" b="1">
+                <a:solidFill>
+                  <a:srgbClr val="1A73E8"/>
+                </a:solidFill>
+                <a:latin typeface="Malgun Gothic"/>
+              </a:rPr>
+              <a:t>04  </a:t>
+            </a:r>
+            <a:r>
+              <a:rPr sz="1200">
+                <a:solidFill>
+                  <a:srgbClr val="202A3C"/>
+                </a:solidFill>
+                <a:latin typeface="Malgun Gothic"/>
+              </a:rPr>
+              <a:t>02. The 5 Core Areas to Drive Engagement</a:t>
+            </a:r>
+            <a:r>
+              <a:rPr sz="1000">
+                <a:solidFill>
+                  <a:srgbClr val="94A3B8"/>
+                </a:solidFill>
+                <a:latin typeface="Malgun Gothic"/>
+              </a:rPr>
+              <a:t>   ·  p.6</a:t>
+            </a:r>
+          </a:p>
+          <a:p>
+            <a:pPr>
+              <a:spcAft>
+                <a:spcPts val="521"/>
+              </a:spcAft>
+            </a:pPr>
+            <a:r>
+              <a:rPr sz="1200" b="1">
+                <a:solidFill>
+                  <a:srgbClr val="1A73E8"/>
+                </a:solidFill>
+                <a:latin typeface="Malgun Gothic"/>
+              </a:rPr>
+              <a:t>05  </a:t>
+            </a:r>
+            <a:r>
+              <a:rPr sz="1200">
+                <a:solidFill>
+                  <a:srgbClr val="202A3C"/>
+                </a:solidFill>
+                <a:latin typeface="Malgun Gothic"/>
+              </a:rPr>
+              <a:t>1. Energy &amp; Expression</a:t>
+            </a:r>
+            <a:r>
+              <a:rPr sz="1000">
+                <a:solidFill>
+                  <a:srgbClr val="94A3B8"/>
+                </a:solidFill>
+                <a:latin typeface="Malgun Gothic"/>
+              </a:rPr>
+              <a:t>   ·  p.7</a:t>
+            </a:r>
+          </a:p>
+          <a:p>
+            <a:pPr>
+              <a:spcAft>
+                <a:spcPts val="521"/>
+              </a:spcAft>
+            </a:pPr>
+            <a:r>
+              <a:rPr sz="1200" b="1">
+                <a:solidFill>
+                  <a:srgbClr val="1A73E8"/>
+                </a:solidFill>
+                <a:latin typeface="Malgun Gothic"/>
+              </a:rPr>
+              <a:t>06  </a:t>
+            </a:r>
+            <a:r>
+              <a:rPr sz="1200">
+                <a:solidFill>
+                  <a:srgbClr val="202A3C"/>
+                </a:solidFill>
+                <a:latin typeface="Malgun Gothic"/>
+              </a:rPr>
+              <a:t>2. Student Talk 60%+</a:t>
+            </a:r>
+            <a:r>
+              <a:rPr sz="1000">
+                <a:solidFill>
+                  <a:srgbClr val="94A3B8"/>
+                </a:solidFill>
+                <a:latin typeface="Malgun Gothic"/>
+              </a:rPr>
+              <a:t>   ·  p.8</a:t>
+            </a:r>
+          </a:p>
+          <a:p>
+            <a:pPr>
+              <a:spcAft>
+                <a:spcPts val="521"/>
+              </a:spcAft>
+            </a:pPr>
+            <a:r>
+              <a:rPr sz="1200" b="1">
+                <a:solidFill>
+                  <a:srgbClr val="1A73E8"/>
+                </a:solidFill>
+                <a:latin typeface="Malgun Gothic"/>
+              </a:rPr>
+              <a:t>07  </a:t>
+            </a:r>
+            <a:r>
+              <a:rPr sz="1200">
+                <a:solidFill>
+                  <a:srgbClr val="202A3C"/>
+                </a:solidFill>
+                <a:latin typeface="Malgun Gothic"/>
+              </a:rPr>
+              <a:t>3. Make Achievement Visible, Instantly</a:t>
+            </a:r>
+            <a:r>
+              <a:rPr sz="1000">
+                <a:solidFill>
+                  <a:srgbClr val="94A3B8"/>
+                </a:solidFill>
+                <a:latin typeface="Malgun Gothic"/>
+              </a:rPr>
+              <a:t>   ·  p.9</a:t>
+            </a:r>
+          </a:p>
+          <a:p>
+            <a:pPr>
+              <a:spcAft>
+                <a:spcPts val="521"/>
+              </a:spcAft>
+            </a:pPr>
+            <a:r>
+              <a:rPr sz="1200" b="1">
+                <a:solidFill>
+                  <a:srgbClr val="1A73E8"/>
+                </a:solidFill>
+                <a:latin typeface="Malgun Gothic"/>
+              </a:rPr>
+              <a:t>08  </a:t>
+            </a:r>
+            <a:r>
+              <a:rPr sz="1200">
+                <a:solidFill>
+                  <a:srgbClr val="202A3C"/>
+                </a:solidFill>
+                <a:latin typeface="Malgun Gothic"/>
+              </a:rPr>
+              <a:t>4. Full Personalization</a:t>
+            </a:r>
+            <a:r>
+              <a:rPr sz="1000">
+                <a:solidFill>
+                  <a:srgbClr val="94A3B8"/>
+                </a:solidFill>
+                <a:latin typeface="Malgun Gothic"/>
+              </a:rPr>
+              <a:t>   ·  p.10</a:t>
+            </a:r>
+          </a:p>
+          <a:p>
+            <a:pPr>
+              <a:spcAft>
+                <a:spcPts val="521"/>
+              </a:spcAft>
+            </a:pPr>
+            <a:r>
+              <a:rPr sz="1200" b="1">
+                <a:solidFill>
+                  <a:srgbClr val="1A73E8"/>
+                </a:solidFill>
+                <a:latin typeface="Malgun Gothic"/>
+              </a:rPr>
+              <a:t>09  </a:t>
+            </a:r>
+            <a:r>
+              <a:rPr sz="1200">
+                <a:solidFill>
+                  <a:srgbClr val="202A3C"/>
+                </a:solidFill>
+                <a:latin typeface="Malgun Gothic"/>
+              </a:rPr>
+              <a:t>5. Rhythmic Transitions</a:t>
+            </a:r>
+            <a:r>
+              <a:rPr sz="1000">
+                <a:solidFill>
+                  <a:srgbClr val="94A3B8"/>
+                </a:solidFill>
+                <a:latin typeface="Malgun Gothic"/>
+              </a:rPr>
+              <a:t>   ·  p.11</a:t>
+            </a:r>
+          </a:p>
+          <a:p>
+            <a:pPr>
+              <a:spcAft>
+                <a:spcPts val="521"/>
+              </a:spcAft>
+            </a:pPr>
+            <a:r>
+              <a:rPr sz="1200" b="1">
+                <a:solidFill>
+                  <a:srgbClr val="1A73E8"/>
+                </a:solidFill>
+                <a:latin typeface="Malgun Gothic"/>
+              </a:rPr>
+              <a:t>10  </a:t>
+            </a:r>
+            <a:r>
+              <a:rPr sz="1200">
+                <a:solidFill>
+                  <a:srgbClr val="202A3C"/>
+                </a:solidFill>
+                <a:latin typeface="Malgun Gothic"/>
+              </a:rPr>
+              <a:t>At a Glance — a Do vs Avoid Quick-Reference Table</a:t>
+            </a:r>
+            <a:r>
+              <a:rPr sz="1000">
+                <a:solidFill>
+                  <a:srgbClr val="94A3B8"/>
+                </a:solidFill>
+                <a:latin typeface="Malgun Gothic"/>
+              </a:rPr>
+              <a:t>   ·  p.12</a:t>
+            </a:r>
+          </a:p>
+          <a:p>
+            <a:pPr>
+              <a:spcAft>
+                <a:spcPts val="521"/>
+              </a:spcAft>
+            </a:pPr>
+            <a:r>
+              <a:rPr sz="1200" b="1">
+                <a:solidFill>
+                  <a:srgbClr val="1A73E8"/>
+                </a:solidFill>
+                <a:latin typeface="Malgun Gothic"/>
+              </a:rPr>
+              <a:t>11  </a:t>
+            </a:r>
+            <a:r>
+              <a:rPr sz="1200">
+                <a:solidFill>
+                  <a:srgbClr val="202A3C"/>
+                </a:solidFill>
+                <a:latin typeface="Malgun Gothic"/>
+              </a:rPr>
+              <a:t>03. Age-Specific Teaching Tactics</a:t>
+            </a:r>
+            <a:r>
+              <a:rPr sz="1000">
+                <a:solidFill>
+                  <a:srgbClr val="94A3B8"/>
+                </a:solidFill>
+                <a:latin typeface="Malgun Gothic"/>
+              </a:rPr>
+              <a:t>   ·  p.13</a:t>
+            </a:r>
+          </a:p>
+          <a:p>
+            <a:pPr>
+              <a:spcAft>
+                <a:spcPts val="521"/>
+              </a:spcAft>
+            </a:pPr>
+            <a:r>
+              <a:rPr sz="1200" b="1">
+                <a:solidFill>
+                  <a:srgbClr val="1A73E8"/>
+                </a:solidFill>
+                <a:latin typeface="Malgun Gothic"/>
+              </a:rPr>
+              <a:t>12  </a:t>
+            </a:r>
+            <a:r>
+              <a:rPr sz="1200">
+                <a:solidFill>
+                  <a:srgbClr val="202A3C"/>
+                </a:solidFill>
+                <a:latin typeface="Malgun Gothic"/>
+              </a:rPr>
+              <a:t>03. Age-Specific Teaching Tactics</a:t>
+            </a:r>
+            <a:r>
+              <a:rPr sz="1000">
+                <a:solidFill>
+                  <a:srgbClr val="94A3B8"/>
+                </a:solidFill>
+                <a:latin typeface="Malgun Gothic"/>
+              </a:rPr>
+              <a:t>   ·  p.14</a:t>
+            </a:r>
+          </a:p>
+          <a:p>
+            <a:pPr>
+              <a:spcAft>
+                <a:spcPts val="521"/>
+              </a:spcAft>
+            </a:pPr>
+            <a:r>
+              <a:rPr sz="1200" b="1">
+                <a:solidFill>
+                  <a:srgbClr val="1A73E8"/>
+                </a:solidFill>
+                <a:latin typeface="Malgun Gothic"/>
+              </a:rPr>
+              <a:t>13  </a:t>
+            </a:r>
+            <a:r>
+              <a:rPr sz="1200">
+                <a:solidFill>
+                  <a:srgbClr val="202A3C"/>
+                </a:solidFill>
+                <a:latin typeface="Malgun Gothic"/>
+              </a:rPr>
+              <a:t>The Data Behind Engagement</a:t>
+            </a:r>
+            <a:r>
+              <a:rPr sz="1000">
+                <a:solidFill>
+                  <a:srgbClr val="94A3B8"/>
+                </a:solidFill>
+                <a:latin typeface="Malgun Gothic"/>
+              </a:rPr>
+              <a:t>   ·  p.15</a:t>
+            </a:r>
+          </a:p>
+          <a:p>
+            <a:pPr>
+              <a:spcAft>
+                <a:spcPts val="521"/>
+              </a:spcAft>
+            </a:pPr>
+            <a:r>
+              <a:rPr sz="1200" b="1">
+                <a:solidFill>
+                  <a:srgbClr val="1A73E8"/>
+                </a:solidFill>
+                <a:latin typeface="Malgun Gothic"/>
+              </a:rPr>
+              <a:t>14  </a:t>
+            </a:r>
+            <a:r>
+              <a:rPr sz="1200">
+                <a:solidFill>
+                  <a:srgbClr val="202A3C"/>
+                </a:solidFill>
+                <a:latin typeface="Malgun Gothic"/>
+              </a:rPr>
+              <a:t>Appendix A. The Engagement Cycle</a:t>
+            </a:r>
+            <a:r>
+              <a:rPr sz="1000">
+                <a:solidFill>
+                  <a:srgbClr val="94A3B8"/>
+                </a:solidFill>
+                <a:latin typeface="Malgun Gothic"/>
+              </a:rPr>
+              <a:t>   ·  p.16</a:t>
+            </a:r>
+          </a:p>
+          <a:p>
+            <a:pPr>
+              <a:spcAft>
+                <a:spcPts val="521"/>
+              </a:spcAft>
+            </a:pPr>
+            <a:r>
+              <a:rPr sz="1200" b="1">
+                <a:solidFill>
+                  <a:srgbClr val="1A73E8"/>
+                </a:solidFill>
+                <a:latin typeface="Malgun Gothic"/>
+              </a:rPr>
+              <a:t>15  </a:t>
+            </a:r>
+            <a:r>
+              <a:rPr sz="1200">
+                <a:solidFill>
+                  <a:srgbClr val="202A3C"/>
+                </a:solidFill>
+                <a:latin typeface="Malgun Gothic"/>
+              </a:rPr>
+              <a:t>Appendix A. The Engagement Cycle</a:t>
+            </a:r>
+            <a:r>
+              <a:rPr sz="1000">
+                <a:solidFill>
+                  <a:srgbClr val="94A3B8"/>
+                </a:solidFill>
+                <a:latin typeface="Malgun Gothic"/>
+              </a:rPr>
+              <a:t>   ·  p.17</a:t>
+            </a:r>
+          </a:p>
+          <a:p>
+            <a:pPr>
+              <a:spcAft>
+                <a:spcPts val="521"/>
+              </a:spcAft>
+            </a:pPr>
+            <a:r>
+              <a:rPr sz="1200" b="1">
+                <a:solidFill>
+                  <a:srgbClr val="1A73E8"/>
+                </a:solidFill>
+                <a:latin typeface="Malgun Gothic"/>
+              </a:rPr>
+              <a:t>16  </a:t>
+            </a:r>
+            <a:r>
+              <a:rPr sz="1200">
+                <a:solidFill>
+                  <a:srgbClr val="202A3C"/>
+                </a:solidFill>
+                <a:latin typeface="Malgun Gothic"/>
+              </a:rPr>
+              <a:t>Appendix B. Teacher Self-Check Checklist</a:t>
+            </a:r>
+            <a:r>
+              <a:rPr sz="1000">
+                <a:solidFill>
+                  <a:srgbClr val="94A3B8"/>
+                </a:solidFill>
+                <a:latin typeface="Malgun Gothic"/>
+              </a:rPr>
+              <a:t>   ·  p.18</a:t>
+            </a:r>
+          </a:p>
+          <a:p>
+            <a:pPr>
+              <a:spcAft>
+                <a:spcPts val="521"/>
+              </a:spcAft>
+            </a:pPr>
+            <a:r>
+              <a:rPr sz="1200" b="1">
+                <a:solidFill>
+                  <a:srgbClr val="1A73E8"/>
+                </a:solidFill>
+                <a:latin typeface="Malgun Gothic"/>
+              </a:rPr>
+              <a:t>17  </a:t>
+            </a:r>
+            <a:r>
+              <a:rPr sz="1200">
+                <a:solidFill>
+                  <a:srgbClr val="202A3C"/>
+                </a:solidFill>
+                <a:latin typeface="Malgun Gothic"/>
+              </a:rPr>
+              <a:t>Appendix C. Teacher Evaluation Rubric</a:t>
+            </a:r>
+            <a:r>
+              <a:rPr sz="1000">
+                <a:solidFill>
+                  <a:srgbClr val="94A3B8"/>
+                </a:solidFill>
+                <a:latin typeface="Malgun Gothic"/>
+              </a:rPr>
+              <a:t>   ·  p.19</a:t>
+            </a:r>
+          </a:p>
+          <a:p>
+            <a:pPr>
+              <a:spcAft>
+                <a:spcPts val="521"/>
+              </a:spcAft>
+            </a:pPr>
+            <a:r>
+              <a:rPr sz="1200" b="1">
+                <a:solidFill>
+                  <a:srgbClr val="1A73E8"/>
+                </a:solidFill>
+                <a:latin typeface="Malgun Gothic"/>
+              </a:rPr>
+              <a:t>18  </a:t>
+            </a:r>
+            <a:r>
+              <a:rPr sz="1200">
+                <a:solidFill>
+                  <a:srgbClr val="202A3C"/>
+                </a:solidFill>
+                <a:latin typeface="Malgun Gothic"/>
+              </a:rPr>
+              <a:t>Coaching Priority Guide by Total Score</a:t>
+            </a:r>
+            <a:r>
+              <a:rPr sz="1000">
+                <a:solidFill>
+                  <a:srgbClr val="94A3B8"/>
+                </a:solidFill>
+                <a:latin typeface="Malgun Gothic"/>
+              </a:rPr>
+              <a:t>   ·  p.20</a:t>
+            </a:r>
+          </a:p>
+          <a:p>
+            <a:pPr>
+              <a:spcAft>
+                <a:spcPts val="521"/>
+              </a:spcAft>
+            </a:pPr>
+            <a:r>
+              <a:rPr sz="1200" b="1">
+                <a:solidFill>
+                  <a:srgbClr val="1A73E8"/>
+                </a:solidFill>
+                <a:latin typeface="Malgun Gothic"/>
+              </a:rPr>
+              <a:t>19  </a:t>
+            </a:r>
+            <a:r>
+              <a:rPr sz="1200">
+                <a:solidFill>
+                  <a:srgbClr val="202A3C"/>
+                </a:solidFill>
+                <a:latin typeface="Malgun Gothic"/>
+              </a:rPr>
+              <a:t>04. Teacher Certification</a:t>
+            </a:r>
+            <a:r>
+              <a:rPr sz="1000">
+                <a:solidFill>
+                  <a:srgbClr val="94A3B8"/>
+                </a:solidFill>
+                <a:latin typeface="Malgun Gothic"/>
+              </a:rPr>
+              <a:t>   ·  p.21</a:t>
+            </a:r>
           </a:p>
         </p:txBody>
       </p:sp>
@@ -11416,8 +12839,8 @@
         </p:nvSpPr>
         <p:spPr>
           <a:xfrm>
-            <a:off x="548640" y="320040"/>
-            <a:ext cx="11064240" cy="640080"/>
+            <a:off x="1325880" y="320040"/>
+            <a:ext cx="10287000" cy="640080"/>
           </a:xfrm>
           <a:prstGeom prst="rect">
             <a:avLst/>
@@ -11480,6 +12903,10 @@
             </a:outerShdw>
           </a:effectLst>
         </p:spPr>
+        <p:txBody>
+          <a:bodyPr/>
+          <a:p/>
+        </p:txBody>
       </p:sp>
       <p:sp>
         <p:nvSpPr>
@@ -11502,6 +12929,10 @@
           </a:solidFill>
           <a:ln/>
         </p:spPr>
+        <p:txBody>
+          <a:bodyPr/>
+          <a:p/>
+        </p:txBody>
       </p:sp>
       <p:sp>
         <p:nvSpPr>
@@ -11522,6 +12953,10 @@
           </a:solidFill>
           <a:ln/>
         </p:spPr>
+        <p:txBody>
+          <a:bodyPr/>
+          <a:p/>
+        </p:txBody>
       </p:sp>
       <p:sp>
         <p:nvSpPr>
@@ -11634,6 +13069,10 @@
             </a:outerShdw>
           </a:effectLst>
         </p:spPr>
+        <p:txBody>
+          <a:bodyPr/>
+          <a:p/>
+        </p:txBody>
       </p:sp>
       <p:sp>
         <p:nvSpPr>
@@ -11656,6 +13095,10 @@
           </a:solidFill>
           <a:ln/>
         </p:spPr>
+        <p:txBody>
+          <a:bodyPr/>
+          <a:p/>
+        </p:txBody>
       </p:sp>
       <p:sp>
         <p:nvSpPr>
@@ -11676,6 +13119,10 @@
           </a:solidFill>
           <a:ln/>
         </p:spPr>
+        <p:txBody>
+          <a:bodyPr/>
+          <a:p/>
+        </p:txBody>
       </p:sp>
       <p:sp>
         <p:nvSpPr>
@@ -11788,6 +13235,10 @@
             </a:outerShdw>
           </a:effectLst>
         </p:spPr>
+        <p:txBody>
+          <a:bodyPr/>
+          <a:p/>
+        </p:txBody>
       </p:sp>
       <p:sp>
         <p:nvSpPr>
@@ -11810,6 +13261,10 @@
           </a:solidFill>
           <a:ln/>
         </p:spPr>
+        <p:txBody>
+          <a:bodyPr/>
+          <a:p/>
+        </p:txBody>
       </p:sp>
       <p:sp>
         <p:nvSpPr>
@@ -11830,6 +13285,10 @@
           </a:solidFill>
           <a:ln/>
         </p:spPr>
+        <p:txBody>
+          <a:bodyPr/>
+          <a:p/>
+        </p:txBody>
       </p:sp>
       <p:sp>
         <p:nvSpPr>
@@ -11942,6 +13401,10 @@
             </a:outerShdw>
           </a:effectLst>
         </p:spPr>
+        <p:txBody>
+          <a:bodyPr/>
+          <a:p/>
+        </p:txBody>
       </p:sp>
       <p:sp>
         <p:nvSpPr>
@@ -11964,6 +13427,10 @@
           </a:solidFill>
           <a:ln/>
         </p:spPr>
+        <p:txBody>
+          <a:bodyPr/>
+          <a:p/>
+        </p:txBody>
       </p:sp>
       <p:sp>
         <p:nvSpPr>
@@ -11984,6 +13451,10 @@
           </a:solidFill>
           <a:ln/>
         </p:spPr>
+        <p:txBody>
+          <a:bodyPr/>
+          <a:p/>
+        </p:txBody>
       </p:sp>
       <p:sp>
         <p:nvSpPr>
@@ -12060,6 +13531,49 @@
               <a:t>switch the activity</a:t>
             </a:r>
             <a:endParaRPr lang="en-US" sz="1350" dirty="0"/>
+          </a:p>
+        </p:txBody>
+      </p:sp>
+      <p:sp>
+        <p:nvSpPr>
+          <p:cNvPr id="3" name="Text 1"/>
+          <p:cNvSpPr/>
+          <p:nvPr/>
+        </p:nvSpPr>
+        <p:spPr>
+          <a:xfrm>
+            <a:off x="548640" y="301751"/>
+            <a:ext cx="502920" cy="502920"/>
+          </a:xfrm>
+          <a:prstGeom prst="rect">
+            <a:avLst/>
+          </a:prstGeom>
+          <a:solidFill>
+            <a:srgbClr val="1A73E8"/>
+          </a:solidFill>
+          <a:ln>
+            <a:noFill/>
+          </a:ln>
+        </p:spPr>
+        <p:txBody>
+          <a:bodyPr wrap="square" lIns="0" tIns="0" rIns="0" bIns="0" rtlCol="0" anchor="ctr"/>
+          <a:lstStyle/>
+          <a:p>
+            <a:pPr algn="ctr" indent="0" marL="0">
+              <a:buNone/>
+            </a:pPr>
+            <a:r>
+              <a:rPr lang="en-US" sz="1300" b="1" dirty="0">
+                <a:solidFill>
+                  <a:srgbClr val="FFFFFF"/>
+                </a:solidFill>
+                <a:latin typeface="Malgun Gothic" pitchFamily="34" charset="0"/>
+                <a:ea typeface="Arial" pitchFamily="34" charset="-122"/>
+                <a:cs typeface="Arial" pitchFamily="34" charset="-120"/>
+              </a:rPr>
+              <a:t>02</a:t>
+            </a:r>
+            <a:endParaRPr lang="en-US" sz="2400" dirty="0"/>
           </a:p>
         </p:txBody>
       </p:sp>
@@ -12103,8 +13617,8 @@
         </p:nvSpPr>
         <p:spPr>
           <a:xfrm>
-            <a:off x="548640" y="320040"/>
-            <a:ext cx="11064240" cy="640080"/>
+            <a:off x="1325880" y="320040"/>
+            <a:ext cx="10287000" cy="640080"/>
           </a:xfrm>
           <a:prstGeom prst="rect">
             <a:avLst/>
@@ -12233,6 +13747,10 @@
           </a:solidFill>
           <a:ln/>
         </p:spPr>
+        <p:txBody>
+          <a:bodyPr/>
+          <a:p/>
+        </p:txBody>
       </p:sp>
       <p:sp>
         <p:nvSpPr>
@@ -12340,6 +13858,49 @@
               <a:t>The more fun a class is (Fun), the more a child keeps coming (Retention), and the longer they stay, the greater their improvement (Achievement).</a:t>
             </a:r>
             <a:endParaRPr lang="en-US" sz="950" dirty="0"/>
+          </a:p>
+        </p:txBody>
+      </p:sp>
+      <p:sp>
+        <p:nvSpPr>
+          <p:cNvPr id="3" name="Text 1"/>
+          <p:cNvSpPr/>
+          <p:nvPr/>
+        </p:nvSpPr>
+        <p:spPr>
+          <a:xfrm>
+            <a:off x="548640" y="301751"/>
+            <a:ext cx="502920" cy="502920"/>
+          </a:xfrm>
+          <a:prstGeom prst="rect">
+            <a:avLst/>
+          </a:prstGeom>
+          <a:solidFill>
+            <a:srgbClr val="1A73E8"/>
+          </a:solidFill>
+          <a:ln>
+            <a:noFill/>
+          </a:ln>
+        </p:spPr>
+        <p:txBody>
+          <a:bodyPr wrap="square" lIns="0" tIns="0" rIns="0" bIns="0" rtlCol="0" anchor="ctr"/>
+          <a:lstStyle/>
+          <a:p>
+            <a:pPr algn="ctr" indent="0" marL="0">
+              <a:buNone/>
+            </a:pPr>
+            <a:r>
+              <a:rPr lang="en-US" sz="1300" b="1" dirty="0">
+                <a:solidFill>
+                  <a:srgbClr val="FFFFFF"/>
+                </a:solidFill>
+                <a:latin typeface="Malgun Gothic" pitchFamily="34" charset="0"/>
+                <a:ea typeface="Arial" pitchFamily="34" charset="-122"/>
+                <a:cs typeface="Arial" pitchFamily="34" charset="-120"/>
+              </a:rPr>
+              <a:t>03</a:t>
+            </a:r>
+            <a:endParaRPr lang="en-US" sz="2400" dirty="0"/>
           </a:p>
         </p:txBody>
       </p:sp>
@@ -12383,8 +13944,8 @@
         </p:nvSpPr>
         <p:spPr>
           <a:xfrm>
-            <a:off x="548640" y="320040"/>
-            <a:ext cx="11064240" cy="640080"/>
+            <a:off x="1325880" y="320040"/>
+            <a:ext cx="10287000" cy="640080"/>
           </a:xfrm>
           <a:prstGeom prst="rect">
             <a:avLst/>
@@ -12474,6 +14035,10 @@
           </a:solidFill>
           <a:ln/>
         </p:spPr>
+        <p:txBody>
+          <a:bodyPr/>
+          <a:p/>
+        </p:txBody>
       </p:sp>
       <p:sp>
         <p:nvSpPr>
@@ -12494,6 +14059,10 @@
           </a:solidFill>
           <a:ln/>
         </p:spPr>
+        <p:txBody>
+          <a:bodyPr/>
+          <a:p/>
+        </p:txBody>
       </p:sp>
       <p:sp>
         <p:nvSpPr>
@@ -12633,6 +14202,10 @@
           </a:solidFill>
           <a:ln/>
         </p:spPr>
+        <p:txBody>
+          <a:bodyPr/>
+          <a:p/>
+        </p:txBody>
       </p:sp>
       <p:sp>
         <p:nvSpPr>
@@ -12653,6 +14226,10 @@
           </a:solidFill>
           <a:ln/>
         </p:spPr>
+        <p:txBody>
+          <a:bodyPr/>
+          <a:p/>
+        </p:txBody>
       </p:sp>
       <p:sp>
         <p:nvSpPr>
@@ -12792,6 +14369,10 @@
           </a:solidFill>
           <a:ln/>
         </p:spPr>
+        <p:txBody>
+          <a:bodyPr/>
+          <a:p/>
+        </p:txBody>
       </p:sp>
       <p:sp>
         <p:nvSpPr>
@@ -12812,6 +14393,10 @@
           </a:solidFill>
           <a:ln/>
         </p:spPr>
+        <p:txBody>
+          <a:bodyPr/>
+          <a:p/>
+        </p:txBody>
       </p:sp>
       <p:sp>
         <p:nvSpPr>
@@ -12951,6 +14536,10 @@
           </a:solidFill>
           <a:ln/>
         </p:spPr>
+        <p:txBody>
+          <a:bodyPr/>
+          <a:p/>
+        </p:txBody>
       </p:sp>
       <p:sp>
         <p:nvSpPr>
@@ -12971,6 +14560,10 @@
           </a:solidFill>
           <a:ln/>
         </p:spPr>
+        <p:txBody>
+          <a:bodyPr/>
+          <a:p/>
+        </p:txBody>
       </p:sp>
       <p:sp>
         <p:nvSpPr>
@@ -13110,6 +14703,10 @@
           </a:solidFill>
           <a:ln/>
         </p:spPr>
+        <p:txBody>
+          <a:bodyPr/>
+          <a:p/>
+        </p:txBody>
       </p:sp>
       <p:sp>
         <p:nvSpPr>
@@ -13130,6 +14727,10 @@
           </a:solidFill>
           <a:ln/>
         </p:spPr>
+        <p:txBody>
+          <a:bodyPr/>
+          <a:p/>
+        </p:txBody>
       </p:sp>
       <p:sp>
         <p:nvSpPr>
@@ -13245,6 +14846,49 @@
               <a:t>Never leave room for boredom — switch activities every 5-7 minutes.</a:t>
             </a:r>
             <a:endParaRPr lang="en-US" sz="1250" dirty="0"/>
+          </a:p>
+        </p:txBody>
+      </p:sp>
+      <p:sp>
+        <p:nvSpPr>
+          <p:cNvPr id="3" name="Text 1"/>
+          <p:cNvSpPr/>
+          <p:nvPr/>
+        </p:nvSpPr>
+        <p:spPr>
+          <a:xfrm>
+            <a:off x="548640" y="301751"/>
+            <a:ext cx="502920" cy="502920"/>
+          </a:xfrm>
+          <a:prstGeom prst="rect">
+            <a:avLst/>
+          </a:prstGeom>
+          <a:solidFill>
+            <a:srgbClr val="1A73E8"/>
+          </a:solidFill>
+          <a:ln>
+            <a:noFill/>
+          </a:ln>
+        </p:spPr>
+        <p:txBody>
+          <a:bodyPr wrap="square" lIns="0" tIns="0" rIns="0" bIns="0" rtlCol="0" anchor="ctr"/>
+          <a:lstStyle/>
+          <a:p>
+            <a:pPr algn="ctr" indent="0" marL="0">
+              <a:buNone/>
+            </a:pPr>
+            <a:r>
+              <a:rPr lang="en-US" sz="1300" b="1" dirty="0">
+                <a:solidFill>
+                  <a:srgbClr val="FFFFFF"/>
+                </a:solidFill>
+                <a:latin typeface="Malgun Gothic" pitchFamily="34" charset="0"/>
+                <a:ea typeface="Arial" pitchFamily="34" charset="-122"/>
+                <a:cs typeface="Arial" pitchFamily="34" charset="-120"/>
+              </a:rPr>
+              <a:t>04</a:t>
+            </a:r>
+            <a:endParaRPr lang="en-US" sz="2400" dirty="0"/>
           </a:p>
         </p:txBody>
       </p:sp>
@@ -13299,6 +14943,10 @@
           </a:solidFill>
           <a:ln/>
         </p:spPr>
+        <p:txBody>
+          <a:bodyPr/>
+          <a:p/>
+        </p:txBody>
       </p:sp>
       <p:sp>
         <p:nvSpPr>
@@ -13314,8 +14962,12 @@
           <a:prstGeom prst="rect">
             <a:avLst/>
           </a:prstGeom>
-          <a:noFill/>
-          <a:ln/>
+          <a:solidFill>
+            <a:srgbClr val="1A73E8"/>
+          </a:solidFill>
+          <a:ln>
+            <a:noFill/>
+          </a:ln>
         </p:spPr>
         <p:txBody>
           <a:bodyPr wrap="square" lIns="0" tIns="0" rIns="0" bIns="0" rtlCol="0" anchor="ctr"/>
@@ -13325,15 +14977,15 @@
               <a:buNone/>
             </a:pPr>
             <a:r>
-              <a:rPr lang="en-US" sz="2400" b="1" dirty="0">
+              <a:rPr lang="en-US" sz="1300" b="1" dirty="0">
                 <a:solidFill>
                   <a:srgbClr val="FFFFFF"/>
                 </a:solidFill>
-                <a:latin typeface="Arial" pitchFamily="34" charset="0"/>
-                <a:ea typeface="Arial" pitchFamily="34" charset="-122"/>
-                <a:cs typeface="Arial" pitchFamily="34" charset="-120"/>
-              </a:rPr>
-              <a:t>1</a:t>
+                <a:latin typeface="Malgun Gothic" pitchFamily="34" charset="0"/>
+                <a:ea typeface="Arial" pitchFamily="34" charset="-122"/>
+                <a:cs typeface="Arial" pitchFamily="34" charset="-120"/>
+              </a:rPr>
+              <a:t>05</a:t>
             </a:r>
             <a:endParaRPr lang="en-US" sz="2400" dirty="0"/>
           </a:p>
@@ -13411,6 +15063,10 @@
             </a:outerShdw>
           </a:effectLst>
         </p:spPr>
+        <p:txBody>
+          <a:bodyPr/>
+          <a:p/>
+        </p:txBody>
       </p:sp>
       <p:sp>
         <p:nvSpPr>
@@ -13433,6 +15089,10 @@
           </a:solidFill>
           <a:ln/>
         </p:spPr>
+        <p:txBody>
+          <a:bodyPr/>
+          <a:p/>
+        </p:txBody>
       </p:sp>
       <p:sp>
         <p:nvSpPr>
@@ -13545,6 +15205,10 @@
             </a:outerShdw>
           </a:effectLst>
         </p:spPr>
+        <p:txBody>
+          <a:bodyPr/>
+          <a:p/>
+        </p:txBody>
       </p:sp>
       <p:sp>
         <p:nvSpPr>
@@ -13567,6 +15231,10 @@
           </a:solidFill>
           <a:ln/>
         </p:spPr>
+        <p:txBody>
+          <a:bodyPr/>
+          <a:p/>
+        </p:txBody>
       </p:sp>
       <p:sp>
         <p:nvSpPr>
@@ -13672,6 +15340,10 @@
             <a:prstDash val="solid"/>
           </a:ln>
         </p:spPr>
+        <p:txBody>
+          <a:bodyPr/>
+          <a:p/>
+        </p:txBody>
       </p:sp>
       <p:sp>
         <p:nvSpPr>
@@ -13694,6 +15366,10 @@
           </a:solidFill>
           <a:ln/>
         </p:spPr>
+        <p:txBody>
+          <a:bodyPr/>
+          <a:p/>
+        </p:txBody>
       </p:sp>
       <p:sp>
         <p:nvSpPr>
@@ -13824,6 +15500,10 @@
           </a:solidFill>
           <a:ln/>
         </p:spPr>
+        <p:txBody>
+          <a:bodyPr/>
+          <a:p/>
+        </p:txBody>
       </p:sp>
       <p:sp>
         <p:nvSpPr>
@@ -13839,8 +15519,12 @@
           <a:prstGeom prst="rect">
             <a:avLst/>
           </a:prstGeom>
-          <a:noFill/>
-          <a:ln/>
+          <a:solidFill>
+            <a:srgbClr val="1A73E8"/>
+          </a:solidFill>
+          <a:ln>
+            <a:noFill/>
+          </a:ln>
         </p:spPr>
         <p:txBody>
           <a:bodyPr wrap="square" lIns="0" tIns="0" rIns="0" bIns="0" rtlCol="0" anchor="ctr"/>
@@ -13850,15 +15534,15 @@
               <a:buNone/>
             </a:pPr>
             <a:r>
-              <a:rPr lang="en-US" sz="2400" b="1" dirty="0">
+              <a:rPr lang="en-US" sz="1300" b="1" dirty="0">
                 <a:solidFill>
                   <a:srgbClr val="FFFFFF"/>
                 </a:solidFill>
-                <a:latin typeface="Arial" pitchFamily="34" charset="0"/>
-                <a:ea typeface="Arial" pitchFamily="34" charset="-122"/>
-                <a:cs typeface="Arial" pitchFamily="34" charset="-120"/>
-              </a:rPr>
-              <a:t>2</a:t>
+                <a:latin typeface="Malgun Gothic" pitchFamily="34" charset="0"/>
+                <a:ea typeface="Arial" pitchFamily="34" charset="-122"/>
+                <a:cs typeface="Arial" pitchFamily="34" charset="-120"/>
+              </a:rPr>
+              <a:t>06</a:t>
             </a:r>
             <a:endParaRPr lang="en-US" sz="2400" dirty="0"/>
           </a:p>
@@ -13936,6 +15620,10 @@
             </a:outerShdw>
           </a:effectLst>
         </p:spPr>
+        <p:txBody>
+          <a:bodyPr/>
+          <a:p/>
+        </p:txBody>
       </p:sp>
       <p:sp>
         <p:nvSpPr>
@@ -13958,6 +15646,10 @@
           </a:solidFill>
           <a:ln/>
         </p:spPr>
+        <p:txBody>
+          <a:bodyPr/>
+          <a:p/>
+        </p:txBody>
       </p:sp>
       <p:sp>
         <p:nvSpPr>
@@ -14070,6 +15762,10 @@
             </a:outerShdw>
           </a:effectLst>
         </p:spPr>
+        <p:txBody>
+          <a:bodyPr/>
+          <a:p/>
+        </p:txBody>
       </p:sp>
       <p:sp>
         <p:nvSpPr>
@@ -14092,6 +15788,10 @@
           </a:solidFill>
           <a:ln/>
         </p:spPr>
+        <p:txBody>
+          <a:bodyPr/>
+          <a:p/>
+        </p:txBody>
       </p:sp>
       <p:sp>
         <p:nvSpPr>
@@ -14197,6 +15897,10 @@
             <a:prstDash val="solid"/>
           </a:ln>
         </p:spPr>
+        <p:txBody>
+          <a:bodyPr/>
+          <a:p/>
+        </p:txBody>
       </p:sp>
       <p:sp>
         <p:nvSpPr>
@@ -14219,6 +15923,10 @@
           </a:solidFill>
           <a:ln/>
         </p:spPr>
+        <p:txBody>
+          <a:bodyPr/>
+          <a:p/>
+        </p:txBody>
       </p:sp>
       <p:sp>
         <p:nvSpPr>
@@ -14349,6 +16057,10 @@
           </a:solidFill>
           <a:ln/>
         </p:spPr>
+        <p:txBody>
+          <a:bodyPr/>
+          <a:p/>
+        </p:txBody>
       </p:sp>
       <p:sp>
         <p:nvSpPr>
@@ -14364,8 +16076,12 @@
           <a:prstGeom prst="rect">
             <a:avLst/>
           </a:prstGeom>
-          <a:noFill/>
-          <a:ln/>
+          <a:solidFill>
+            <a:srgbClr val="1A73E8"/>
+          </a:solidFill>
+          <a:ln>
+            <a:noFill/>
+          </a:ln>
         </p:spPr>
         <p:txBody>
           <a:bodyPr wrap="square" lIns="0" tIns="0" rIns="0" bIns="0" rtlCol="0" anchor="ctr"/>
@@ -14375,15 +16091,15 @@
               <a:buNone/>
             </a:pPr>
             <a:r>
-              <a:rPr lang="en-US" sz="2400" b="1" dirty="0">
+              <a:rPr lang="en-US" sz="1300" b="1" dirty="0">
                 <a:solidFill>
                   <a:srgbClr val="FFFFFF"/>
                 </a:solidFill>
-                <a:latin typeface="Arial" pitchFamily="34" charset="0"/>
-                <a:ea typeface="Arial" pitchFamily="34" charset="-122"/>
-                <a:cs typeface="Arial" pitchFamily="34" charset="-120"/>
-              </a:rPr>
-              <a:t>3</a:t>
+                <a:latin typeface="Malgun Gothic" pitchFamily="34" charset="0"/>
+                <a:ea typeface="Arial" pitchFamily="34" charset="-122"/>
+                <a:cs typeface="Arial" pitchFamily="34" charset="-120"/>
+              </a:rPr>
+              <a:t>07</a:t>
             </a:r>
             <a:endParaRPr lang="en-US" sz="2400" dirty="0"/>
           </a:p>
@@ -14461,6 +16177,10 @@
             </a:outerShdw>
           </a:effectLst>
         </p:spPr>
+        <p:txBody>
+          <a:bodyPr/>
+          <a:p/>
+        </p:txBody>
       </p:sp>
       <p:sp>
         <p:nvSpPr>
@@ -14483,6 +16203,10 @@
           </a:solidFill>
           <a:ln/>
         </p:spPr>
+        <p:txBody>
+          <a:bodyPr/>
+          <a:p/>
+        </p:txBody>
       </p:sp>
       <p:sp>
         <p:nvSpPr>
@@ -14595,6 +16319,10 @@
             </a:outerShdw>
           </a:effectLst>
         </p:spPr>
+        <p:txBody>
+          <a:bodyPr/>
+          <a:p/>
+        </p:txBody>
       </p:sp>
       <p:sp>
         <p:nvSpPr>
@@ -14617,6 +16345,10 @@
           </a:solidFill>
           <a:ln/>
         </p:spPr>
+        <p:txBody>
+          <a:bodyPr/>
+          <a:p/>
+        </p:txBody>
       </p:sp>
       <p:sp>
         <p:nvSpPr>
@@ -14722,6 +16454,10 @@
             <a:prstDash val="solid"/>
           </a:ln>
         </p:spPr>
+        <p:txBody>
+          <a:bodyPr/>
+          <a:p/>
+        </p:txBody>
       </p:sp>
       <p:sp>
         <p:nvSpPr>
@@ -14744,6 +16480,10 @@
           </a:solidFill>
           <a:ln/>
         </p:spPr>
+        <p:txBody>
+          <a:bodyPr/>
+          <a:p/>
+        </p:txBody>
       </p:sp>
       <p:sp>
         <p:nvSpPr>
@@ -14874,6 +16614,10 @@
           </a:solidFill>
           <a:ln/>
         </p:spPr>
+        <p:txBody>
+          <a:bodyPr/>
+          <a:p/>
+        </p:txBody>
       </p:sp>
       <p:sp>
         <p:nvSpPr>
@@ -14889,8 +16633,12 @@
           <a:prstGeom prst="rect">
             <a:avLst/>
           </a:prstGeom>
-          <a:noFill/>
-          <a:ln/>
+          <a:solidFill>
+            <a:srgbClr val="1A73E8"/>
+          </a:solidFill>
+          <a:ln>
+            <a:noFill/>
+          </a:ln>
         </p:spPr>
         <p:txBody>
           <a:bodyPr wrap="square" lIns="0" tIns="0" rIns="0" bIns="0" rtlCol="0" anchor="ctr"/>
@@ -14900,15 +16648,15 @@
               <a:buNone/>
             </a:pPr>
             <a:r>
-              <a:rPr lang="en-US" sz="2400" b="1" dirty="0">
+              <a:rPr lang="en-US" sz="1300" b="1" dirty="0">
                 <a:solidFill>
                   <a:srgbClr val="FFFFFF"/>
                 </a:solidFill>
-                <a:latin typeface="Arial" pitchFamily="34" charset="0"/>
-                <a:ea typeface="Arial" pitchFamily="34" charset="-122"/>
-                <a:cs typeface="Arial" pitchFamily="34" charset="-120"/>
-              </a:rPr>
-              <a:t>4</a:t>
+                <a:latin typeface="Malgun Gothic" pitchFamily="34" charset="0"/>
+                <a:ea typeface="Arial" pitchFamily="34" charset="-122"/>
+                <a:cs typeface="Arial" pitchFamily="34" charset="-120"/>
+              </a:rPr>
+              <a:t>08</a:t>
             </a:r>
             <a:endParaRPr lang="en-US" sz="2400" dirty="0"/>
           </a:p>
@@ -14986,6 +16734,10 @@
             </a:outerShdw>
           </a:effectLst>
         </p:spPr>
+        <p:txBody>
+          <a:bodyPr/>
+          <a:p/>
+        </p:txBody>
       </p:sp>
       <p:sp>
         <p:nvSpPr>
@@ -15008,6 +16760,10 @@
           </a:solidFill>
           <a:ln/>
         </p:spPr>
+        <p:txBody>
+          <a:bodyPr/>
+          <a:p/>
+        </p:txBody>
       </p:sp>
       <p:sp>
         <p:nvSpPr>
@@ -15120,6 +16876,10 @@
             </a:outerShdw>
           </a:effectLst>
         </p:spPr>
+        <p:txBody>
+          <a:bodyPr/>
+          <a:p/>
+        </p:txBody>
       </p:sp>
       <p:sp>
         <p:nvSpPr>
@@ -15142,6 +16902,10 @@
           </a:solidFill>
           <a:ln/>
         </p:spPr>
+        <p:txBody>
+          <a:bodyPr/>
+          <a:p/>
+        </p:txBody>
       </p:sp>
       <p:sp>
         <p:nvSpPr>
@@ -15247,6 +17011,10 @@
             <a:prstDash val="solid"/>
           </a:ln>
         </p:spPr>
+        <p:txBody>
+          <a:bodyPr/>
+          <a:p/>
+        </p:txBody>
       </p:sp>
       <p:sp>
         <p:nvSpPr>
@@ -15269,6 +17037,10 @@
           </a:solidFill>
           <a:ln/>
         </p:spPr>
+        <p:txBody>
+          <a:bodyPr/>
+          <a:p/>
+        </p:txBody>
       </p:sp>
       <p:sp>
         <p:nvSpPr>
